--- a/wf-pan-server/src/main/resources/doc-templates/new.pptx
+++ b/wf-pan-server/src/main/resources/doc-templates/new.pptx
@@ -11,7 +11,7 @@
   <p:notesSz cx="6858000" cy="9144000"/>
   <p:defaultTextStyle>
     <a:defPPr>
-      <a:defRPr lang="en-US"/>
+      <a:defRPr lang="zh-CN"/>
     </a:defPPr>
     <a:lvl1pPr marL="0" algn="l" defTabSz="457200" rtl="0" eaLnBrk="1" latinLnBrk="0" hangingPunct="1">
       <a:defRPr sz="1800" kern="1200">
@@ -145,10 +145,10 @@
           <a:lstStyle/>
           <a:p>
             <a:r>
-              <a:rPr lang="en-US" smtClean="0"/>
+              <a:rPr lang="zh-CN" smtClean="0"/>
               <a:t>Click to edit Master title style</a:t>
             </a:r>
-            <a:endParaRPr lang="en-US"/>
+            <a:endParaRPr lang="zh-CN"/>
           </a:p>
         </p:txBody>
       </p:sp>
@@ -264,10 +264,10 @@
           </a:lstStyle>
           <a:p>
             <a:r>
-              <a:rPr lang="en-US" smtClean="0"/>
+              <a:rPr lang="zh-CN" smtClean="0"/>
               <a:t>Click to edit Master subtitle style</a:t>
             </a:r>
-            <a:endParaRPr lang="en-US"/>
+            <a:endParaRPr lang="zh-CN"/>
           </a:p>
         </p:txBody>
       </p:sp>
@@ -287,10 +287,10 @@
           <a:lstStyle/>
           <a:p>
             <a:fld id="{5BCAD085-E8A6-8845-BD4E-CB4CCA059FC4}" type="datetimeFigureOut">
-              <a:rPr lang="en-US" smtClean="0"/>
+              <a:rPr lang="zh-CN" smtClean="0"/>
               <a:t>1/27/13</a:t>
             </a:fld>
-            <a:endParaRPr lang="en-US"/>
+            <a:endParaRPr lang="zh-CN"/>
           </a:p>
         </p:txBody>
       </p:sp>
@@ -309,7 +309,7 @@
           <a:bodyPr/>
           <a:lstStyle/>
           <a:p>
-            <a:endParaRPr lang="en-US"/>
+            <a:endParaRPr lang="zh-CN"/>
           </a:p>
         </p:txBody>
       </p:sp>
@@ -329,10 +329,10 @@
           <a:lstStyle/>
           <a:p>
             <a:fld id="{C1FF6DA9-008F-8B48-92A6-B652298478BF}" type="slidenum">
-              <a:rPr lang="en-US" smtClean="0"/>
+              <a:rPr lang="zh-CN" smtClean="0"/>
               <a:t>‹#›</a:t>
             </a:fld>
-            <a:endParaRPr lang="en-US"/>
+            <a:endParaRPr lang="zh-CN"/>
           </a:p>
         </p:txBody>
       </p:sp>
@@ -382,10 +382,10 @@
           <a:lstStyle/>
           <a:p>
             <a:r>
-              <a:rPr lang="en-US" smtClean="0"/>
+              <a:rPr lang="zh-CN" smtClean="0"/>
               <a:t>Click to edit Master title style</a:t>
             </a:r>
-            <a:endParaRPr lang="en-US"/>
+            <a:endParaRPr lang="zh-CN"/>
           </a:p>
         </p:txBody>
       </p:sp>
@@ -406,38 +406,38 @@
           <a:p>
             <a:pPr lvl="0"/>
             <a:r>
-              <a:rPr lang="en-US" smtClean="0"/>
+              <a:rPr lang="zh-CN" smtClean="0"/>
               <a:t>Click to edit Master text styles</a:t>
             </a:r>
           </a:p>
           <a:p>
             <a:pPr lvl="1"/>
             <a:r>
-              <a:rPr lang="en-US" smtClean="0"/>
+              <a:rPr lang="zh-CN" smtClean="0"/>
               <a:t>Second level</a:t>
             </a:r>
           </a:p>
           <a:p>
             <a:pPr lvl="2"/>
             <a:r>
-              <a:rPr lang="en-US" smtClean="0"/>
+              <a:rPr lang="zh-CN" smtClean="0"/>
               <a:t>Third level</a:t>
             </a:r>
           </a:p>
           <a:p>
             <a:pPr lvl="3"/>
             <a:r>
-              <a:rPr lang="en-US" smtClean="0"/>
+              <a:rPr lang="zh-CN" smtClean="0"/>
               <a:t>Fourth level</a:t>
             </a:r>
           </a:p>
           <a:p>
             <a:pPr lvl="4"/>
             <a:r>
-              <a:rPr lang="en-US" smtClean="0"/>
+              <a:rPr lang="zh-CN" smtClean="0"/>
               <a:t>Fifth level</a:t>
             </a:r>
-            <a:endParaRPr lang="en-US"/>
+            <a:endParaRPr lang="zh-CN"/>
           </a:p>
         </p:txBody>
       </p:sp>
@@ -457,10 +457,10 @@
           <a:lstStyle/>
           <a:p>
             <a:fld id="{5BCAD085-E8A6-8845-BD4E-CB4CCA059FC4}" type="datetimeFigureOut">
-              <a:rPr lang="en-US" smtClean="0"/>
+              <a:rPr lang="zh-CN" smtClean="0"/>
               <a:t>1/27/13</a:t>
             </a:fld>
-            <a:endParaRPr lang="en-US"/>
+            <a:endParaRPr lang="zh-CN"/>
           </a:p>
         </p:txBody>
       </p:sp>
@@ -479,7 +479,7 @@
           <a:bodyPr/>
           <a:lstStyle/>
           <a:p>
-            <a:endParaRPr lang="en-US"/>
+            <a:endParaRPr lang="zh-CN"/>
           </a:p>
         </p:txBody>
       </p:sp>
@@ -499,10 +499,10 @@
           <a:lstStyle/>
           <a:p>
             <a:fld id="{C1FF6DA9-008F-8B48-92A6-B652298478BF}" type="slidenum">
-              <a:rPr lang="en-US" smtClean="0"/>
+              <a:rPr lang="zh-CN" smtClean="0"/>
               <a:t>‹#›</a:t>
             </a:fld>
-            <a:endParaRPr lang="en-US"/>
+            <a:endParaRPr lang="zh-CN"/>
           </a:p>
         </p:txBody>
       </p:sp>
@@ -557,10 +557,10 @@
           <a:lstStyle/>
           <a:p>
             <a:r>
-              <a:rPr lang="en-US" smtClean="0"/>
+              <a:rPr lang="zh-CN" smtClean="0"/>
               <a:t>Click to edit Master title style</a:t>
             </a:r>
-            <a:endParaRPr lang="en-US"/>
+            <a:endParaRPr lang="zh-CN"/>
           </a:p>
         </p:txBody>
       </p:sp>
@@ -586,38 +586,38 @@
           <a:p>
             <a:pPr lvl="0"/>
             <a:r>
-              <a:rPr lang="en-US" smtClean="0"/>
+              <a:rPr lang="zh-CN" smtClean="0"/>
               <a:t>Click to edit Master text styles</a:t>
             </a:r>
           </a:p>
           <a:p>
             <a:pPr lvl="1"/>
             <a:r>
-              <a:rPr lang="en-US" smtClean="0"/>
+              <a:rPr lang="zh-CN" smtClean="0"/>
               <a:t>Second level</a:t>
             </a:r>
           </a:p>
           <a:p>
             <a:pPr lvl="2"/>
             <a:r>
-              <a:rPr lang="en-US" smtClean="0"/>
+              <a:rPr lang="zh-CN" smtClean="0"/>
               <a:t>Third level</a:t>
             </a:r>
           </a:p>
           <a:p>
             <a:pPr lvl="3"/>
             <a:r>
-              <a:rPr lang="en-US" smtClean="0"/>
+              <a:rPr lang="zh-CN" smtClean="0"/>
               <a:t>Fourth level</a:t>
             </a:r>
           </a:p>
           <a:p>
             <a:pPr lvl="4"/>
             <a:r>
-              <a:rPr lang="en-US" smtClean="0"/>
+              <a:rPr lang="zh-CN" smtClean="0"/>
               <a:t>Fifth level</a:t>
             </a:r>
-            <a:endParaRPr lang="en-US"/>
+            <a:endParaRPr lang="zh-CN"/>
           </a:p>
         </p:txBody>
       </p:sp>
@@ -637,10 +637,10 @@
           <a:lstStyle/>
           <a:p>
             <a:fld id="{5BCAD085-E8A6-8845-BD4E-CB4CCA059FC4}" type="datetimeFigureOut">
-              <a:rPr lang="en-US" smtClean="0"/>
+              <a:rPr lang="zh-CN" smtClean="0"/>
               <a:t>1/27/13</a:t>
             </a:fld>
-            <a:endParaRPr lang="en-US"/>
+            <a:endParaRPr lang="zh-CN"/>
           </a:p>
         </p:txBody>
       </p:sp>
@@ -659,7 +659,7 @@
           <a:bodyPr/>
           <a:lstStyle/>
           <a:p>
-            <a:endParaRPr lang="en-US"/>
+            <a:endParaRPr lang="zh-CN"/>
           </a:p>
         </p:txBody>
       </p:sp>
@@ -679,10 +679,10 @@
           <a:lstStyle/>
           <a:p>
             <a:fld id="{C1FF6DA9-008F-8B48-92A6-B652298478BF}" type="slidenum">
-              <a:rPr lang="en-US" smtClean="0"/>
+              <a:rPr lang="zh-CN" smtClean="0"/>
               <a:t>‹#›</a:t>
             </a:fld>
-            <a:endParaRPr lang="en-US"/>
+            <a:endParaRPr lang="zh-CN"/>
           </a:p>
         </p:txBody>
       </p:sp>
@@ -732,10 +732,10 @@
           <a:lstStyle/>
           <a:p>
             <a:r>
-              <a:rPr lang="en-US" smtClean="0"/>
+              <a:rPr lang="zh-CN" smtClean="0"/>
               <a:t>Click to edit Master title style</a:t>
             </a:r>
-            <a:endParaRPr lang="en-US"/>
+            <a:endParaRPr lang="zh-CN"/>
           </a:p>
         </p:txBody>
       </p:sp>
@@ -756,38 +756,38 @@
           <a:p>
             <a:pPr lvl="0"/>
             <a:r>
-              <a:rPr lang="en-US" smtClean="0"/>
+              <a:rPr lang="zh-CN" smtClean="0"/>
               <a:t>Click to edit Master text styles</a:t>
             </a:r>
           </a:p>
           <a:p>
             <a:pPr lvl="1"/>
             <a:r>
-              <a:rPr lang="en-US" smtClean="0"/>
+              <a:rPr lang="zh-CN" smtClean="0"/>
               <a:t>Second level</a:t>
             </a:r>
           </a:p>
           <a:p>
             <a:pPr lvl="2"/>
             <a:r>
-              <a:rPr lang="en-US" smtClean="0"/>
+              <a:rPr lang="zh-CN" smtClean="0"/>
               <a:t>Third level</a:t>
             </a:r>
           </a:p>
           <a:p>
             <a:pPr lvl="3"/>
             <a:r>
-              <a:rPr lang="en-US" smtClean="0"/>
+              <a:rPr lang="zh-CN" smtClean="0"/>
               <a:t>Fourth level</a:t>
             </a:r>
           </a:p>
           <a:p>
             <a:pPr lvl="4"/>
             <a:r>
-              <a:rPr lang="en-US" smtClean="0"/>
+              <a:rPr lang="zh-CN" smtClean="0"/>
               <a:t>Fifth level</a:t>
             </a:r>
-            <a:endParaRPr lang="en-US"/>
+            <a:endParaRPr lang="zh-CN"/>
           </a:p>
         </p:txBody>
       </p:sp>
@@ -807,10 +807,10 @@
           <a:lstStyle/>
           <a:p>
             <a:fld id="{5BCAD085-E8A6-8845-BD4E-CB4CCA059FC4}" type="datetimeFigureOut">
-              <a:rPr lang="en-US" smtClean="0"/>
+              <a:rPr lang="zh-CN" smtClean="0"/>
               <a:t>1/27/13</a:t>
             </a:fld>
-            <a:endParaRPr lang="en-US"/>
+            <a:endParaRPr lang="zh-CN"/>
           </a:p>
         </p:txBody>
       </p:sp>
@@ -829,7 +829,7 @@
           <a:bodyPr/>
           <a:lstStyle/>
           <a:p>
-            <a:endParaRPr lang="en-US"/>
+            <a:endParaRPr lang="zh-CN"/>
           </a:p>
         </p:txBody>
       </p:sp>
@@ -849,10 +849,10 @@
           <a:lstStyle/>
           <a:p>
             <a:fld id="{C1FF6DA9-008F-8B48-92A6-B652298478BF}" type="slidenum">
-              <a:rPr lang="en-US" smtClean="0"/>
+              <a:rPr lang="zh-CN" smtClean="0"/>
               <a:t>‹#›</a:t>
             </a:fld>
-            <a:endParaRPr lang="en-US"/>
+            <a:endParaRPr lang="zh-CN"/>
           </a:p>
         </p:txBody>
       </p:sp>
@@ -911,10 +911,10 @@
           </a:lstStyle>
           <a:p>
             <a:r>
-              <a:rPr lang="en-US" smtClean="0"/>
+              <a:rPr lang="zh-CN" smtClean="0"/>
               <a:t>Click to edit Master title style</a:t>
             </a:r>
-            <a:endParaRPr lang="en-US"/>
+            <a:endParaRPr lang="zh-CN"/>
           </a:p>
         </p:txBody>
       </p:sp>
@@ -1031,7 +1031,7 @@
           <a:p>
             <a:pPr lvl="0"/>
             <a:r>
-              <a:rPr lang="en-US" smtClean="0"/>
+              <a:rPr lang="zh-CN" smtClean="0"/>
               <a:t>Click to edit Master text styles</a:t>
             </a:r>
           </a:p>
@@ -1053,10 +1053,10 @@
           <a:lstStyle/>
           <a:p>
             <a:fld id="{5BCAD085-E8A6-8845-BD4E-CB4CCA059FC4}" type="datetimeFigureOut">
-              <a:rPr lang="en-US" smtClean="0"/>
+              <a:rPr lang="zh-CN" smtClean="0"/>
               <a:t>1/27/13</a:t>
             </a:fld>
-            <a:endParaRPr lang="en-US"/>
+            <a:endParaRPr lang="zh-CN"/>
           </a:p>
         </p:txBody>
       </p:sp>
@@ -1075,7 +1075,7 @@
           <a:bodyPr/>
           <a:lstStyle/>
           <a:p>
-            <a:endParaRPr lang="en-US"/>
+            <a:endParaRPr lang="zh-CN"/>
           </a:p>
         </p:txBody>
       </p:sp>
@@ -1095,10 +1095,10 @@
           <a:lstStyle/>
           <a:p>
             <a:fld id="{C1FF6DA9-008F-8B48-92A6-B652298478BF}" type="slidenum">
-              <a:rPr lang="en-US" smtClean="0"/>
+              <a:rPr lang="zh-CN" smtClean="0"/>
               <a:t>‹#›</a:t>
             </a:fld>
-            <a:endParaRPr lang="en-US"/>
+            <a:endParaRPr lang="zh-CN"/>
           </a:p>
         </p:txBody>
       </p:sp>
@@ -1148,10 +1148,10 @@
           <a:lstStyle/>
           <a:p>
             <a:r>
-              <a:rPr lang="en-US" smtClean="0"/>
+              <a:rPr lang="zh-CN" smtClean="0"/>
               <a:t>Click to edit Master title style</a:t>
             </a:r>
-            <a:endParaRPr lang="en-US"/>
+            <a:endParaRPr lang="zh-CN"/>
           </a:p>
         </p:txBody>
       </p:sp>
@@ -1205,38 +1205,38 @@
           <a:p>
             <a:pPr lvl="0"/>
             <a:r>
-              <a:rPr lang="en-US" smtClean="0"/>
+              <a:rPr lang="zh-CN" smtClean="0"/>
               <a:t>Click to edit Master text styles</a:t>
             </a:r>
           </a:p>
           <a:p>
             <a:pPr lvl="1"/>
             <a:r>
-              <a:rPr lang="en-US" smtClean="0"/>
+              <a:rPr lang="zh-CN" smtClean="0"/>
               <a:t>Second level</a:t>
             </a:r>
           </a:p>
           <a:p>
             <a:pPr lvl="2"/>
             <a:r>
-              <a:rPr lang="en-US" smtClean="0"/>
+              <a:rPr lang="zh-CN" smtClean="0"/>
               <a:t>Third level</a:t>
             </a:r>
           </a:p>
           <a:p>
             <a:pPr lvl="3"/>
             <a:r>
-              <a:rPr lang="en-US" smtClean="0"/>
+              <a:rPr lang="zh-CN" smtClean="0"/>
               <a:t>Fourth level</a:t>
             </a:r>
           </a:p>
           <a:p>
             <a:pPr lvl="4"/>
             <a:r>
-              <a:rPr lang="en-US" smtClean="0"/>
+              <a:rPr lang="zh-CN" smtClean="0"/>
               <a:t>Fifth level</a:t>
             </a:r>
-            <a:endParaRPr lang="en-US"/>
+            <a:endParaRPr lang="zh-CN"/>
           </a:p>
         </p:txBody>
       </p:sp>
@@ -1290,38 +1290,38 @@
           <a:p>
             <a:pPr lvl="0"/>
             <a:r>
-              <a:rPr lang="en-US" smtClean="0"/>
+              <a:rPr lang="zh-CN" smtClean="0"/>
               <a:t>Click to edit Master text styles</a:t>
             </a:r>
           </a:p>
           <a:p>
             <a:pPr lvl="1"/>
             <a:r>
-              <a:rPr lang="en-US" smtClean="0"/>
+              <a:rPr lang="zh-CN" smtClean="0"/>
               <a:t>Second level</a:t>
             </a:r>
           </a:p>
           <a:p>
             <a:pPr lvl="2"/>
             <a:r>
-              <a:rPr lang="en-US" smtClean="0"/>
+              <a:rPr lang="zh-CN" smtClean="0"/>
               <a:t>Third level</a:t>
             </a:r>
           </a:p>
           <a:p>
             <a:pPr lvl="3"/>
             <a:r>
-              <a:rPr lang="en-US" smtClean="0"/>
+              <a:rPr lang="zh-CN" smtClean="0"/>
               <a:t>Fourth level</a:t>
             </a:r>
           </a:p>
           <a:p>
             <a:pPr lvl="4"/>
             <a:r>
-              <a:rPr lang="en-US" smtClean="0"/>
+              <a:rPr lang="zh-CN" smtClean="0"/>
               <a:t>Fifth level</a:t>
             </a:r>
-            <a:endParaRPr lang="en-US"/>
+            <a:endParaRPr lang="zh-CN"/>
           </a:p>
         </p:txBody>
       </p:sp>
@@ -1341,10 +1341,10 @@
           <a:lstStyle/>
           <a:p>
             <a:fld id="{5BCAD085-E8A6-8845-BD4E-CB4CCA059FC4}" type="datetimeFigureOut">
-              <a:rPr lang="en-US" smtClean="0"/>
+              <a:rPr lang="zh-CN" smtClean="0"/>
               <a:t>1/27/13</a:t>
             </a:fld>
-            <a:endParaRPr lang="en-US"/>
+            <a:endParaRPr lang="zh-CN"/>
           </a:p>
         </p:txBody>
       </p:sp>
@@ -1363,7 +1363,7 @@
           <a:bodyPr/>
           <a:lstStyle/>
           <a:p>
-            <a:endParaRPr lang="en-US"/>
+            <a:endParaRPr lang="zh-CN"/>
           </a:p>
         </p:txBody>
       </p:sp>
@@ -1383,10 +1383,10 @@
           <a:lstStyle/>
           <a:p>
             <a:fld id="{C1FF6DA9-008F-8B48-92A6-B652298478BF}" type="slidenum">
-              <a:rPr lang="en-US" smtClean="0"/>
+              <a:rPr lang="zh-CN" smtClean="0"/>
               <a:t>‹#›</a:t>
             </a:fld>
-            <a:endParaRPr lang="en-US"/>
+            <a:endParaRPr lang="zh-CN"/>
           </a:p>
         </p:txBody>
       </p:sp>
@@ -1440,10 +1440,10 @@
           </a:lstStyle>
           <a:p>
             <a:r>
-              <a:rPr lang="en-US" smtClean="0"/>
+              <a:rPr lang="zh-CN" smtClean="0"/>
               <a:t>Click to edit Master title style</a:t>
             </a:r>
-            <a:endParaRPr lang="en-US"/>
+            <a:endParaRPr lang="zh-CN"/>
           </a:p>
         </p:txBody>
       </p:sp>
@@ -1506,7 +1506,7 @@
           <a:p>
             <a:pPr lvl="0"/>
             <a:r>
-              <a:rPr lang="en-US" smtClean="0"/>
+              <a:rPr lang="zh-CN" smtClean="0"/>
               <a:t>Click to edit Master text styles</a:t>
             </a:r>
           </a:p>
@@ -1562,38 +1562,38 @@
           <a:p>
             <a:pPr lvl="0"/>
             <a:r>
-              <a:rPr lang="en-US" smtClean="0"/>
+              <a:rPr lang="zh-CN" smtClean="0"/>
               <a:t>Click to edit Master text styles</a:t>
             </a:r>
           </a:p>
           <a:p>
             <a:pPr lvl="1"/>
             <a:r>
-              <a:rPr lang="en-US" smtClean="0"/>
+              <a:rPr lang="zh-CN" smtClean="0"/>
               <a:t>Second level</a:t>
             </a:r>
           </a:p>
           <a:p>
             <a:pPr lvl="2"/>
             <a:r>
-              <a:rPr lang="en-US" smtClean="0"/>
+              <a:rPr lang="zh-CN" smtClean="0"/>
               <a:t>Third level</a:t>
             </a:r>
           </a:p>
           <a:p>
             <a:pPr lvl="3"/>
             <a:r>
-              <a:rPr lang="en-US" smtClean="0"/>
+              <a:rPr lang="zh-CN" smtClean="0"/>
               <a:t>Fourth level</a:t>
             </a:r>
           </a:p>
           <a:p>
             <a:pPr lvl="4"/>
             <a:r>
-              <a:rPr lang="en-US" smtClean="0"/>
+              <a:rPr lang="zh-CN" smtClean="0"/>
               <a:t>Fifth level</a:t>
             </a:r>
-            <a:endParaRPr lang="en-US"/>
+            <a:endParaRPr lang="zh-CN"/>
           </a:p>
         </p:txBody>
       </p:sp>
@@ -1656,7 +1656,7 @@
           <a:p>
             <a:pPr lvl="0"/>
             <a:r>
-              <a:rPr lang="en-US" smtClean="0"/>
+              <a:rPr lang="zh-CN" smtClean="0"/>
               <a:t>Click to edit Master text styles</a:t>
             </a:r>
           </a:p>
@@ -1712,38 +1712,38 @@
           <a:p>
             <a:pPr lvl="0"/>
             <a:r>
-              <a:rPr lang="en-US" smtClean="0"/>
+              <a:rPr lang="zh-CN" smtClean="0"/>
               <a:t>Click to edit Master text styles</a:t>
             </a:r>
           </a:p>
           <a:p>
             <a:pPr lvl="1"/>
             <a:r>
-              <a:rPr lang="en-US" smtClean="0"/>
+              <a:rPr lang="zh-CN" smtClean="0"/>
               <a:t>Second level</a:t>
             </a:r>
           </a:p>
           <a:p>
             <a:pPr lvl="2"/>
             <a:r>
-              <a:rPr lang="en-US" smtClean="0"/>
+              <a:rPr lang="zh-CN" smtClean="0"/>
               <a:t>Third level</a:t>
             </a:r>
           </a:p>
           <a:p>
             <a:pPr lvl="3"/>
             <a:r>
-              <a:rPr lang="en-US" smtClean="0"/>
+              <a:rPr lang="zh-CN" smtClean="0"/>
               <a:t>Fourth level</a:t>
             </a:r>
           </a:p>
           <a:p>
             <a:pPr lvl="4"/>
             <a:r>
-              <a:rPr lang="en-US" smtClean="0"/>
+              <a:rPr lang="zh-CN" smtClean="0"/>
               <a:t>Fifth level</a:t>
             </a:r>
-            <a:endParaRPr lang="en-US"/>
+            <a:endParaRPr lang="zh-CN"/>
           </a:p>
         </p:txBody>
       </p:sp>
@@ -1763,10 +1763,10 @@
           <a:lstStyle/>
           <a:p>
             <a:fld id="{5BCAD085-E8A6-8845-BD4E-CB4CCA059FC4}" type="datetimeFigureOut">
-              <a:rPr lang="en-US" smtClean="0"/>
+              <a:rPr lang="zh-CN" smtClean="0"/>
               <a:t>1/27/13</a:t>
             </a:fld>
-            <a:endParaRPr lang="en-US"/>
+            <a:endParaRPr lang="zh-CN"/>
           </a:p>
         </p:txBody>
       </p:sp>
@@ -1785,7 +1785,7 @@
           <a:bodyPr/>
           <a:lstStyle/>
           <a:p>
-            <a:endParaRPr lang="en-US"/>
+            <a:endParaRPr lang="zh-CN"/>
           </a:p>
         </p:txBody>
       </p:sp>
@@ -1805,10 +1805,10 @@
           <a:lstStyle/>
           <a:p>
             <a:fld id="{C1FF6DA9-008F-8B48-92A6-B652298478BF}" type="slidenum">
-              <a:rPr lang="en-US" smtClean="0"/>
+              <a:rPr lang="zh-CN" smtClean="0"/>
               <a:t>‹#›</a:t>
             </a:fld>
-            <a:endParaRPr lang="en-US"/>
+            <a:endParaRPr lang="zh-CN"/>
           </a:p>
         </p:txBody>
       </p:sp>
@@ -1858,10 +1858,10 @@
           <a:lstStyle/>
           <a:p>
             <a:r>
-              <a:rPr lang="en-US" smtClean="0"/>
+              <a:rPr lang="zh-CN" smtClean="0"/>
               <a:t>Click to edit Master title style</a:t>
             </a:r>
-            <a:endParaRPr lang="en-US"/>
+            <a:endParaRPr lang="zh-CN"/>
           </a:p>
         </p:txBody>
       </p:sp>
@@ -1881,10 +1881,10 @@
           <a:lstStyle/>
           <a:p>
             <a:fld id="{5BCAD085-E8A6-8845-BD4E-CB4CCA059FC4}" type="datetimeFigureOut">
-              <a:rPr lang="en-US" smtClean="0"/>
+              <a:rPr lang="zh-CN" smtClean="0"/>
               <a:t>1/27/13</a:t>
             </a:fld>
-            <a:endParaRPr lang="en-US"/>
+            <a:endParaRPr lang="zh-CN"/>
           </a:p>
         </p:txBody>
       </p:sp>
@@ -1903,7 +1903,7 @@
           <a:bodyPr/>
           <a:lstStyle/>
           <a:p>
-            <a:endParaRPr lang="en-US"/>
+            <a:endParaRPr lang="zh-CN"/>
           </a:p>
         </p:txBody>
       </p:sp>
@@ -1923,10 +1923,10 @@
           <a:lstStyle/>
           <a:p>
             <a:fld id="{C1FF6DA9-008F-8B48-92A6-B652298478BF}" type="slidenum">
-              <a:rPr lang="en-US" smtClean="0"/>
+              <a:rPr lang="zh-CN" smtClean="0"/>
               <a:t>‹#›</a:t>
             </a:fld>
-            <a:endParaRPr lang="en-US"/>
+            <a:endParaRPr lang="zh-CN"/>
           </a:p>
         </p:txBody>
       </p:sp>
@@ -1976,10 +1976,10 @@
           <a:lstStyle/>
           <a:p>
             <a:fld id="{5BCAD085-E8A6-8845-BD4E-CB4CCA059FC4}" type="datetimeFigureOut">
-              <a:rPr lang="en-US" smtClean="0"/>
+              <a:rPr lang="zh-CN" smtClean="0"/>
               <a:t>1/27/13</a:t>
             </a:fld>
-            <a:endParaRPr lang="en-US"/>
+            <a:endParaRPr lang="zh-CN"/>
           </a:p>
         </p:txBody>
       </p:sp>
@@ -1998,7 +1998,7 @@
           <a:bodyPr/>
           <a:lstStyle/>
           <a:p>
-            <a:endParaRPr lang="en-US"/>
+            <a:endParaRPr lang="zh-CN"/>
           </a:p>
         </p:txBody>
       </p:sp>
@@ -2018,10 +2018,10 @@
           <a:lstStyle/>
           <a:p>
             <a:fld id="{C1FF6DA9-008F-8B48-92A6-B652298478BF}" type="slidenum">
-              <a:rPr lang="en-US" smtClean="0"/>
+              <a:rPr lang="zh-CN" smtClean="0"/>
               <a:t>‹#›</a:t>
             </a:fld>
-            <a:endParaRPr lang="en-US"/>
+            <a:endParaRPr lang="zh-CN"/>
           </a:p>
         </p:txBody>
       </p:sp>
@@ -2080,10 +2080,10 @@
           </a:lstStyle>
           <a:p>
             <a:r>
-              <a:rPr lang="en-US" smtClean="0"/>
+              <a:rPr lang="zh-CN" smtClean="0"/>
               <a:t>Click to edit Master title style</a:t>
             </a:r>
-            <a:endParaRPr lang="en-US"/>
+            <a:endParaRPr lang="zh-CN"/>
           </a:p>
         </p:txBody>
       </p:sp>
@@ -2137,38 +2137,38 @@
           <a:p>
             <a:pPr lvl="0"/>
             <a:r>
-              <a:rPr lang="en-US" smtClean="0"/>
+              <a:rPr lang="zh-CN" smtClean="0"/>
               <a:t>Click to edit Master text styles</a:t>
             </a:r>
           </a:p>
           <a:p>
             <a:pPr lvl="1"/>
             <a:r>
-              <a:rPr lang="en-US" smtClean="0"/>
+              <a:rPr lang="zh-CN" smtClean="0"/>
               <a:t>Second level</a:t>
             </a:r>
           </a:p>
           <a:p>
             <a:pPr lvl="2"/>
             <a:r>
-              <a:rPr lang="en-US" smtClean="0"/>
+              <a:rPr lang="zh-CN" smtClean="0"/>
               <a:t>Third level</a:t>
             </a:r>
           </a:p>
           <a:p>
             <a:pPr lvl="3"/>
             <a:r>
-              <a:rPr lang="en-US" smtClean="0"/>
+              <a:rPr lang="zh-CN" smtClean="0"/>
               <a:t>Fourth level</a:t>
             </a:r>
           </a:p>
           <a:p>
             <a:pPr lvl="4"/>
             <a:r>
-              <a:rPr lang="en-US" smtClean="0"/>
+              <a:rPr lang="zh-CN" smtClean="0"/>
               <a:t>Fifth level</a:t>
             </a:r>
-            <a:endParaRPr lang="en-US"/>
+            <a:endParaRPr lang="zh-CN"/>
           </a:p>
         </p:txBody>
       </p:sp>
@@ -2231,7 +2231,7 @@
           <a:p>
             <a:pPr lvl="0"/>
             <a:r>
-              <a:rPr lang="en-US" smtClean="0"/>
+              <a:rPr lang="zh-CN" smtClean="0"/>
               <a:t>Click to edit Master text styles</a:t>
             </a:r>
           </a:p>
@@ -2253,10 +2253,10 @@
           <a:lstStyle/>
           <a:p>
             <a:fld id="{5BCAD085-E8A6-8845-BD4E-CB4CCA059FC4}" type="datetimeFigureOut">
-              <a:rPr lang="en-US" smtClean="0"/>
+              <a:rPr lang="zh-CN" smtClean="0"/>
               <a:t>1/27/13</a:t>
             </a:fld>
-            <a:endParaRPr lang="en-US"/>
+            <a:endParaRPr lang="zh-CN"/>
           </a:p>
         </p:txBody>
       </p:sp>
@@ -2275,7 +2275,7 @@
           <a:bodyPr/>
           <a:lstStyle/>
           <a:p>
-            <a:endParaRPr lang="en-US"/>
+            <a:endParaRPr lang="zh-CN"/>
           </a:p>
         </p:txBody>
       </p:sp>
@@ -2295,10 +2295,10 @@
           <a:lstStyle/>
           <a:p>
             <a:fld id="{C1FF6DA9-008F-8B48-92A6-B652298478BF}" type="slidenum">
-              <a:rPr lang="en-US" smtClean="0"/>
+              <a:rPr lang="zh-CN" smtClean="0"/>
               <a:t>‹#›</a:t>
             </a:fld>
-            <a:endParaRPr lang="en-US"/>
+            <a:endParaRPr lang="zh-CN"/>
           </a:p>
         </p:txBody>
       </p:sp>
@@ -2357,10 +2357,10 @@
           </a:lstStyle>
           <a:p>
             <a:r>
-              <a:rPr lang="en-US" smtClean="0"/>
+              <a:rPr lang="zh-CN" smtClean="0"/>
               <a:t>Click to edit Master title style</a:t>
             </a:r>
-            <a:endParaRPr lang="en-US"/>
+            <a:endParaRPr lang="zh-CN"/>
           </a:p>
         </p:txBody>
       </p:sp>
@@ -2421,7 +2421,7 @@
             </a:lvl9pPr>
           </a:lstStyle>
           <a:p>
-            <a:endParaRPr lang="en-US"/>
+            <a:endParaRPr lang="zh-CN"/>
           </a:p>
         </p:txBody>
       </p:sp>
@@ -2484,7 +2484,7 @@
           <a:p>
             <a:pPr lvl="0"/>
             <a:r>
-              <a:rPr lang="en-US" smtClean="0"/>
+              <a:rPr lang="zh-CN" smtClean="0"/>
               <a:t>Click to edit Master text styles</a:t>
             </a:r>
           </a:p>
@@ -2506,10 +2506,10 @@
           <a:lstStyle/>
           <a:p>
             <a:fld id="{5BCAD085-E8A6-8845-BD4E-CB4CCA059FC4}" type="datetimeFigureOut">
-              <a:rPr lang="en-US" smtClean="0"/>
+              <a:rPr lang="zh-CN" smtClean="0"/>
               <a:t>1/27/13</a:t>
             </a:fld>
-            <a:endParaRPr lang="en-US"/>
+            <a:endParaRPr lang="zh-CN"/>
           </a:p>
         </p:txBody>
       </p:sp>
@@ -2528,7 +2528,7 @@
           <a:bodyPr/>
           <a:lstStyle/>
           <a:p>
-            <a:endParaRPr lang="en-US"/>
+            <a:endParaRPr lang="zh-CN"/>
           </a:p>
         </p:txBody>
       </p:sp>
@@ -2548,10 +2548,10 @@
           <a:lstStyle/>
           <a:p>
             <a:fld id="{C1FF6DA9-008F-8B48-92A6-B652298478BF}" type="slidenum">
-              <a:rPr lang="en-US" smtClean="0"/>
+              <a:rPr lang="zh-CN" smtClean="0"/>
               <a:t>‹#›</a:t>
             </a:fld>
-            <a:endParaRPr lang="en-US"/>
+            <a:endParaRPr lang="zh-CN"/>
           </a:p>
         </p:txBody>
       </p:sp>
@@ -2616,10 +2616,10 @@
           <a:lstStyle/>
           <a:p>
             <a:r>
-              <a:rPr lang="en-US" smtClean="0"/>
+              <a:rPr lang="zh-CN" smtClean="0"/>
               <a:t>Click to edit Master title style</a:t>
             </a:r>
-            <a:endParaRPr lang="en-US"/>
+            <a:endParaRPr lang="zh-CN"/>
           </a:p>
         </p:txBody>
       </p:sp>
@@ -2650,38 +2650,38 @@
           <a:p>
             <a:pPr lvl="0"/>
             <a:r>
-              <a:rPr lang="en-US" smtClean="0"/>
+              <a:rPr lang="zh-CN" smtClean="0"/>
               <a:t>Click to edit Master text styles</a:t>
             </a:r>
           </a:p>
           <a:p>
             <a:pPr lvl="1"/>
             <a:r>
-              <a:rPr lang="en-US" smtClean="0"/>
+              <a:rPr lang="zh-CN" smtClean="0"/>
               <a:t>Second level</a:t>
             </a:r>
           </a:p>
           <a:p>
             <a:pPr lvl="2"/>
             <a:r>
-              <a:rPr lang="en-US" smtClean="0"/>
+              <a:rPr lang="zh-CN" smtClean="0"/>
               <a:t>Third level</a:t>
             </a:r>
           </a:p>
           <a:p>
             <a:pPr lvl="3"/>
             <a:r>
-              <a:rPr lang="en-US" smtClean="0"/>
+              <a:rPr lang="zh-CN" smtClean="0"/>
               <a:t>Fourth level</a:t>
             </a:r>
           </a:p>
           <a:p>
             <a:pPr lvl="4"/>
             <a:r>
-              <a:rPr lang="en-US" smtClean="0"/>
+              <a:rPr lang="zh-CN" smtClean="0"/>
               <a:t>Fifth level</a:t>
             </a:r>
-            <a:endParaRPr lang="en-US"/>
+            <a:endParaRPr lang="zh-CN"/>
           </a:p>
         </p:txBody>
       </p:sp>
@@ -2719,10 +2719,10 @@
           </a:lstStyle>
           <a:p>
             <a:fld id="{5BCAD085-E8A6-8845-BD4E-CB4CCA059FC4}" type="datetimeFigureOut">
-              <a:rPr lang="en-US" smtClean="0"/>
+              <a:rPr lang="zh-CN" smtClean="0"/>
               <a:t>1/27/13</a:t>
             </a:fld>
-            <a:endParaRPr lang="en-US"/>
+            <a:endParaRPr lang="zh-CN"/>
           </a:p>
         </p:txBody>
       </p:sp>
@@ -2759,7 +2759,7 @@
             </a:lvl1pPr>
           </a:lstStyle>
           <a:p>
-            <a:endParaRPr lang="en-US"/>
+            <a:endParaRPr lang="zh-CN"/>
           </a:p>
         </p:txBody>
       </p:sp>
@@ -2797,10 +2797,10 @@
           </a:lstStyle>
           <a:p>
             <a:fld id="{C1FF6DA9-008F-8B48-92A6-B652298478BF}" type="slidenum">
-              <a:rPr lang="en-US" smtClean="0"/>
+              <a:rPr lang="zh-CN" smtClean="0"/>
               <a:t>‹#›</a:t>
             </a:fld>
-            <a:endParaRPr lang="en-US"/>
+            <a:endParaRPr lang="zh-CN"/>
           </a:p>
         </p:txBody>
       </p:sp>
@@ -2981,7 +2981,7 @@
     </p:bodyStyle>
     <p:otherStyle>
       <a:defPPr>
-        <a:defRPr lang="en-US"/>
+        <a:defRPr lang="zh-CN"/>
       </a:defPPr>
       <a:lvl1pPr marL="0" algn="l" defTabSz="457200" rtl="0" eaLnBrk="1" latinLnBrk="0" hangingPunct="1">
         <a:defRPr sz="1800" kern="1200">
